--- a/templates/base_template.pptx
+++ b/templates/base_template.pptx
@@ -7,7 +7,6 @@
   <p:sldIdLst>
     <p:sldId id="256" r:id="rId7"/>
     <p:sldId id="257" r:id="rId8"/>
-    <p:sldId id="258" r:id="rId9"/>
   </p:sldIdLst>
   <p:sldSz cx="12191695" cy="6858000" type="screen4x3"/>
   <p:notesSz cx="6858000" cy="9144000"/>
@@ -3218,41 +3217,6 @@
         </p:nvSpPr>
         <p:spPr>
           <a:xfrm>
-            <a:off x="731520" y="731520"/>
-            <a:ext cx="3657600" cy="548640"/>
-          </a:xfrm>
-          <a:prstGeom prst="rect">
-            <a:avLst/>
-          </a:prstGeom>
-          <a:noFill/>
-        </p:spPr>
-        <p:txBody>
-          <a:bodyPr wrap="square">
-            <a:spAutoFit/>
-          </a:bodyPr>
-          <a:lstStyle/>
-          <a:p>
-            <a:pPr>
-              <a:defRPr sz="1400" b="1">
-                <a:solidFill>
-                  <a:srgbClr val="0D9488"/>
-                </a:solidFill>
-              </a:defRPr>
-            </a:pPr>
-            <a:r>
-              <a:t>MOTHER AI</a:t>
-            </a:r>
-          </a:p>
-        </p:txBody>
-      </p:sp>
-      <p:sp>
-        <p:nvSpPr>
-          <p:cNvPr id="7" name="TextBox 6"/>
-          <p:cNvSpPr txBox="1"/>
-          <p:nvPr/>
-        </p:nvSpPr>
-        <p:spPr>
-          <a:xfrm>
             <a:off x="1097280" y="1828800"/>
             <a:ext cx="10058400" cy="1645920"/>
           </a:xfrm>
@@ -3262,7 +3226,7 @@
           <a:noFill/>
         </p:spPr>
         <p:txBody>
-          <a:bodyPr wrap="square">
+          <a:bodyPr wrap="none">
             <a:spAutoFit/>
           </a:bodyPr>
           <a:lstStyle/>
@@ -3270,82 +3234,12 @@
             <a:pPr>
               <a:defRPr sz="4400" b="1">
                 <a:solidFill>
-                  <a:srgbClr val="F1F5F9"/>
+                  <a:srgbClr val="0F172A"/>
                 </a:solidFill>
               </a:defRPr>
             </a:pPr>
             <a:r>
-              <a:t>Presentation Title Master</a:t>
-            </a:r>
-          </a:p>
-        </p:txBody>
-      </p:sp>
-      <p:sp>
-        <p:nvSpPr>
-          <p:cNvPr id="8" name="TextBox 7"/>
-          <p:cNvSpPr txBox="1"/>
-          <p:nvPr/>
-        </p:nvSpPr>
-        <p:spPr>
-          <a:xfrm>
-            <a:off x="1097280" y="3657600"/>
-            <a:ext cx="10058400" cy="1097280"/>
-          </a:xfrm>
-          <a:prstGeom prst="rect">
-            <a:avLst/>
-          </a:prstGeom>
-          <a:noFill/>
-        </p:spPr>
-        <p:txBody>
-          <a:bodyPr wrap="square">
-            <a:spAutoFit/>
-          </a:bodyPr>
-          <a:lstStyle/>
-          <a:p>
-            <a:pPr>
-              <a:defRPr sz="2200">
-                <a:solidFill>
-                  <a:srgbClr val="0D9488"/>
-                </a:solidFill>
-              </a:defRPr>
-            </a:pPr>
-            <a:r>
-              <a:t>Subtitle or Key Takeaway Text</a:t>
-            </a:r>
-          </a:p>
-        </p:txBody>
-      </p:sp>
-      <p:sp>
-        <p:nvSpPr>
-          <p:cNvPr id="9" name="TextBox 8"/>
-          <p:cNvSpPr txBox="1"/>
-          <p:nvPr/>
-        </p:nvSpPr>
-        <p:spPr>
-          <a:xfrm>
-            <a:off x="731520" y="6035040"/>
-            <a:ext cx="10698480" cy="365760"/>
-          </a:xfrm>
-          <a:prstGeom prst="rect">
-            <a:avLst/>
-          </a:prstGeom>
-          <a:noFill/>
-        </p:spPr>
-        <p:txBody>
-          <a:bodyPr wrap="none">
-            <a:spAutoFit/>
-          </a:bodyPr>
-          <a:lstStyle/>
-          <a:p>
-            <a:pPr>
-              <a:defRPr sz="900">
-                <a:solidFill>
-                  <a:srgbClr val="64748B"/>
-                </a:solidFill>
-              </a:defRPr>
-            </a:pPr>
-            <a:r>
-              <a:t>Generated by MOTHER AI Presentation System • Confidential</a:t>
+              <a:t>Default Slate Teal</a:t>
             </a:r>
           </a:p>
         </p:txBody>
@@ -3411,7 +3305,50 @@
         <p:spPr>
           <a:xfrm>
             <a:off x="0" y="0"/>
-            <a:ext cx="12191695" cy="73152"/>
+            <a:ext cx="12191695" cy="6858000"/>
+          </a:xfrm>
+          <a:prstGeom prst="rect">
+            <a:avLst/>
+          </a:prstGeom>
+          <a:solidFill>
+            <a:srgbClr val="0F172A"/>
+          </a:solidFill>
+          <a:ln>
+            <a:noFill/>
+          </a:ln>
+        </p:spPr>
+        <p:style>
+          <a:lnRef idx="1">
+            <a:schemeClr val="accent1"/>
+          </a:lnRef>
+          <a:fillRef idx="3">
+            <a:schemeClr val="accent1"/>
+          </a:fillRef>
+          <a:effectRef idx="2">
+            <a:schemeClr val="accent1"/>
+          </a:effectRef>
+          <a:fontRef idx="minor">
+            <a:schemeClr val="lt1"/>
+          </a:fontRef>
+        </p:style>
+        <p:txBody>
+          <a:bodyPr rtlCol="0" anchor="ctr"/>
+          <a:lstStyle/>
+          <a:p>
+            <a:pPr algn="ctr"/>
+          </a:p>
+        </p:txBody>
+      </p:sp>
+      <p:sp>
+        <p:nvSpPr>
+          <p:cNvPr id="5" name="Rectangle 4"/>
+          <p:cNvSpPr/>
+          <p:nvPr/>
+        </p:nvSpPr>
+        <p:spPr>
+          <a:xfrm>
+            <a:off x="0" y="0"/>
+            <a:ext cx="12191695" cy="91440"/>
           </a:xfrm>
           <a:prstGeom prst="rect">
             <a:avLst/>
@@ -3447,84 +3384,14 @@
       </p:sp>
       <p:sp>
         <p:nvSpPr>
-          <p:cNvPr id="5" name="TextBox 4"/>
-          <p:cNvSpPr txBox="1"/>
-          <p:nvPr/>
-        </p:nvSpPr>
-        <p:spPr>
-          <a:xfrm>
-            <a:off x="9601200" y="320040"/>
-            <a:ext cx="1828800" cy="365760"/>
-          </a:xfrm>
-          <a:prstGeom prst="rect">
-            <a:avLst/>
-          </a:prstGeom>
-          <a:noFill/>
-        </p:spPr>
-        <p:txBody>
-          <a:bodyPr wrap="none">
-            <a:spAutoFit/>
-          </a:bodyPr>
-          <a:lstStyle/>
-          <a:p>
-            <a:pPr algn="r">
-              <a:defRPr sz="1000" b="1">
-                <a:solidFill>
-                  <a:srgbClr val="0D9488"/>
-                </a:solidFill>
-              </a:defRPr>
-            </a:pPr>
-            <a:r>
-              <a:t>MOTHER AI</a:t>
-            </a:r>
-          </a:p>
-        </p:txBody>
-      </p:sp>
-      <p:sp>
-        <p:nvSpPr>
-          <p:cNvPr id="6" name="TextBox 5"/>
-          <p:cNvSpPr txBox="1"/>
-          <p:nvPr/>
-        </p:nvSpPr>
-        <p:spPr>
-          <a:xfrm>
-            <a:off x="731520" y="320040"/>
-            <a:ext cx="8686800" cy="731520"/>
-          </a:xfrm>
-          <a:prstGeom prst="rect">
-            <a:avLst/>
-          </a:prstGeom>
-          <a:noFill/>
-        </p:spPr>
-        <p:txBody>
-          <a:bodyPr wrap="square">
-            <a:spAutoFit/>
-          </a:bodyPr>
-          <a:lstStyle/>
-          <a:p>
-            <a:pPr>
-              <a:defRPr sz="2800" b="1">
-                <a:solidFill>
-                  <a:srgbClr val="0F172A"/>
-                </a:solidFill>
-              </a:defRPr>
-            </a:pPr>
-            <a:r>
-              <a:t>Slide Header Title</a:t>
-            </a:r>
-          </a:p>
-        </p:txBody>
-      </p:sp>
-      <p:sp>
-        <p:nvSpPr>
-          <p:cNvPr id="7" name="Rounded Rectangle 6"/>
+          <p:cNvPr id="6" name="Rounded Rectangle 5"/>
           <p:cNvSpPr/>
           <p:nvPr/>
         </p:nvSpPr>
         <p:spPr>
           <a:xfrm>
             <a:off x="731520" y="1188720"/>
-            <a:ext cx="10728655" cy="4846320"/>
+            <a:ext cx="10728655" cy="5029200"/>
           </a:xfrm>
           <a:prstGeom prst="roundRect">
             <a:avLst/>
@@ -3532,262 +3399,7 @@
           <a:solidFill>
             <a:srgbClr val="F8FAFC"/>
           </a:solidFill>
-          <a:ln w="12700">
-            <a:solidFill>
-              <a:srgbClr val="E2E8F0"/>
-            </a:solidFill>
-          </a:ln>
-        </p:spPr>
-        <p:style>
-          <a:lnRef idx="1">
-            <a:schemeClr val="accent1"/>
-          </a:lnRef>
-          <a:fillRef idx="3">
-            <a:schemeClr val="accent1"/>
-          </a:fillRef>
-          <a:effectRef idx="2">
-            <a:schemeClr val="accent1"/>
-          </a:effectRef>
-          <a:fontRef idx="minor">
-            <a:schemeClr val="lt1"/>
-          </a:fontRef>
-        </p:style>
-        <p:txBody>
-          <a:bodyPr rtlCol="0" anchor="ctr"/>
-          <a:lstStyle/>
-          <a:p>
-            <a:pPr algn="ctr"/>
-          </a:p>
-        </p:txBody>
-      </p:sp>
-      <p:sp>
-        <p:nvSpPr>
-          <p:cNvPr id="8" name="TextBox 7"/>
-          <p:cNvSpPr txBox="1"/>
-          <p:nvPr/>
-        </p:nvSpPr>
-        <p:spPr>
-          <a:xfrm>
-            <a:off x="731520" y="6217920"/>
-            <a:ext cx="5486400" cy="274320"/>
-          </a:xfrm>
-          <a:prstGeom prst="rect">
-            <a:avLst/>
-          </a:prstGeom>
-          <a:noFill/>
-        </p:spPr>
-        <p:txBody>
-          <a:bodyPr wrap="none">
-            <a:spAutoFit/>
-          </a:bodyPr>
-          <a:lstStyle/>
-          <a:p>
-            <a:pPr>
-              <a:defRPr sz="900">
-                <a:solidFill>
-                  <a:srgbClr val="64748B"/>
-                </a:solidFill>
-              </a:defRPr>
-            </a:pPr>
-            <a:r>
-              <a:t>MOTHER Presentation Engine</a:t>
-            </a:r>
-          </a:p>
-        </p:txBody>
-      </p:sp>
-    </p:spTree>
-  </p:cSld>
-  <p:clrMapOvr>
-    <a:masterClrMapping/>
-  </p:clrMapOvr>
-</p:sld>
-</file>
-
-<file path=ppt/slides/slide3.xml><?xml version="1.0" encoding="utf-8"?>
-<p:sld xmlns:a="http://schemas.openxmlformats.org/drawingml/2006/main" xmlns:p="http://schemas.openxmlformats.org/presentationml/2006/main" xmlns:r="http://schemas.openxmlformats.org/officeDocument/2006/relationships">
-  <p:cSld>
-    <p:spTree>
-      <p:nvGrpSpPr>
-        <p:cNvPr id="1" name=""/>
-        <p:cNvGrpSpPr/>
-        <p:nvPr/>
-      </p:nvGrpSpPr>
-      <p:grpSpPr/>
-      <p:sp>
-        <p:nvSpPr>
-          <p:cNvPr id="2" name="Title 1"/>
-          <p:cNvSpPr>
-            <a:spLocks noGrp="1"/>
-          </p:cNvSpPr>
-          <p:nvPr>
-            <p:ph type="title"/>
-          </p:nvPr>
-        </p:nvSpPr>
-        <p:spPr/>
-        <p:txBody>
-          <a:bodyPr/>
-          <a:lstStyle/>
-          <a:p/>
-        </p:txBody>
-      </p:sp>
-      <p:sp>
-        <p:nvSpPr>
-          <p:cNvPr id="3" name="Text Placeholder 2"/>
-          <p:cNvSpPr>
-            <a:spLocks noGrp="1"/>
-          </p:cNvSpPr>
-          <p:nvPr>
-            <p:ph type="body" idx="1"/>
-          </p:nvPr>
-        </p:nvSpPr>
-        <p:spPr/>
-        <p:txBody>
-          <a:bodyPr/>
-          <a:lstStyle/>
-          <a:p/>
-        </p:txBody>
-      </p:sp>
-      <p:sp>
-        <p:nvSpPr>
-          <p:cNvPr id="4" name="Rectangle 3"/>
-          <p:cNvSpPr/>
-          <p:nvPr/>
-        </p:nvSpPr>
-        <p:spPr>
-          <a:xfrm>
-            <a:off x="0" y="0"/>
-            <a:ext cx="12191695" cy="73152"/>
-          </a:xfrm>
-          <a:prstGeom prst="rect">
-            <a:avLst/>
-          </a:prstGeom>
-          <a:solidFill>
-            <a:srgbClr val="6366F1"/>
-          </a:solidFill>
-          <a:ln>
-            <a:noFill/>
-          </a:ln>
-        </p:spPr>
-        <p:style>
-          <a:lnRef idx="1">
-            <a:schemeClr val="accent1"/>
-          </a:lnRef>
-          <a:fillRef idx="3">
-            <a:schemeClr val="accent1"/>
-          </a:fillRef>
-          <a:effectRef idx="2">
-            <a:schemeClr val="accent1"/>
-          </a:effectRef>
-          <a:fontRef idx="minor">
-            <a:schemeClr val="lt1"/>
-          </a:fontRef>
-        </p:style>
-        <p:txBody>
-          <a:bodyPr rtlCol="0" anchor="ctr"/>
-          <a:lstStyle/>
-          <a:p>
-            <a:pPr algn="ctr"/>
-          </a:p>
-        </p:txBody>
-      </p:sp>
-      <p:sp>
-        <p:nvSpPr>
-          <p:cNvPr id="5" name="TextBox 4"/>
-          <p:cNvSpPr txBox="1"/>
-          <p:nvPr/>
-        </p:nvSpPr>
-        <p:spPr>
-          <a:xfrm>
-            <a:off x="731520" y="320040"/>
-            <a:ext cx="8686800" cy="731520"/>
-          </a:xfrm>
-          <a:prstGeom prst="rect">
-            <a:avLst/>
-          </a:prstGeom>
-          <a:noFill/>
-        </p:spPr>
-        <p:txBody>
-          <a:bodyPr wrap="none">
-            <a:spAutoFit/>
-          </a:bodyPr>
-          <a:lstStyle/>
-          <a:p>
-            <a:pPr>
-              <a:defRPr sz="2800" b="1">
-                <a:solidFill>
-                  <a:srgbClr val="0F172A"/>
-                </a:solidFill>
-              </a:defRPr>
-            </a:pPr>
-            <a:r>
-              <a:t>Two Column Comparison Title</a:t>
-            </a:r>
-          </a:p>
-        </p:txBody>
-      </p:sp>
-      <p:sp>
-        <p:nvSpPr>
-          <p:cNvPr id="6" name="Rounded Rectangle 5"/>
-          <p:cNvSpPr/>
-          <p:nvPr/>
-        </p:nvSpPr>
-        <p:spPr>
-          <a:xfrm>
-            <a:off x="731520" y="1188720"/>
-            <a:ext cx="5212080" cy="4846320"/>
-          </a:xfrm>
-          <a:prstGeom prst="roundRect">
-            <a:avLst/>
-          </a:prstGeom>
-          <a:solidFill>
-            <a:srgbClr val="F8FAFC"/>
-          </a:solidFill>
-          <a:ln w="12700">
-            <a:solidFill>
-              <a:srgbClr val="E2E8F0"/>
-            </a:solidFill>
-          </a:ln>
-        </p:spPr>
-        <p:style>
-          <a:lnRef idx="1">
-            <a:schemeClr val="accent1"/>
-          </a:lnRef>
-          <a:fillRef idx="3">
-            <a:schemeClr val="accent1"/>
-          </a:fillRef>
-          <a:effectRef idx="2">
-            <a:schemeClr val="accent1"/>
-          </a:effectRef>
-          <a:fontRef idx="minor">
-            <a:schemeClr val="lt1"/>
-          </a:fontRef>
-        </p:style>
-        <p:txBody>
-          <a:bodyPr rtlCol="0" anchor="ctr"/>
-          <a:lstStyle/>
-          <a:p>
-            <a:pPr algn="ctr"/>
-          </a:p>
-        </p:txBody>
-      </p:sp>
-      <p:sp>
-        <p:nvSpPr>
-          <p:cNvPr id="7" name="Rounded Rectangle 6"/>
-          <p:cNvSpPr/>
-          <p:nvPr/>
-        </p:nvSpPr>
-        <p:spPr>
-          <a:xfrm>
-            <a:off x="6248095" y="1188720"/>
-            <a:ext cx="5212080" cy="4846320"/>
-          </a:xfrm>
-          <a:prstGeom prst="roundRect">
-            <a:avLst/>
-          </a:prstGeom>
-          <a:solidFill>
-            <a:srgbClr val="F8FAFC"/>
-          </a:solidFill>
-          <a:ln w="12700">
+          <a:ln w="19050">
             <a:solidFill>
               <a:srgbClr val="E2E8F0"/>
             </a:solidFill>
